--- a/public/documents/presentation-salaatu-alaa-nabii.pptx
+++ b/public/documents/presentation-salaatu-alaa-nabii.pptx
@@ -2877,7 +2877,7 @@
                 <a:ea typeface="Calibri" pitchFamily="34" charset="-122"/>
                 <a:cs typeface="Calibri" pitchFamily="34" charset="-120"/>
               </a:rPr>
-              <a:t>Porteur du projet : Birama Gueuye     ·     Réalisation : Khadim Fall — Cosmos Studio</a:t>
+              <a:t>Porteur du projet : Birima Gueye     ·     Réalisation : Khadim Fall — Cosmos Studio</a:t>
             </a:r>
             <a:endParaRPr lang="en-US" sz="1200" dirty="0"/>
           </a:p>
@@ -5795,7 +5795,7 @@
                 <a:ea typeface="Cambria" pitchFamily="34" charset="-122"/>
                 <a:cs typeface="Cambria" pitchFamily="34" charset="-120"/>
               </a:rPr>
-              <a:t>Birama Gueuye</a:t>
+              <a:t>Birima Gueye</a:t>
             </a:r>
             <a:endParaRPr lang="en-US" sz="1600" dirty="0"/>
           </a:p>
@@ -6790,7 +6790,7 @@
                 <a:ea typeface="Cambria" pitchFamily="34" charset="-122"/>
                 <a:cs typeface="Cambria" pitchFamily="34" charset="-120"/>
               </a:rPr>
-              <a:t>Birama Gueuye</a:t>
+              <a:t>Birima Gueye</a:t>
             </a:r>
             <a:endParaRPr lang="en-US" sz="1600" dirty="0"/>
           </a:p>

--- a/public/documents/presentation-salaatu-alaa-nabii.pptx
+++ b/public/documents/presentation-salaatu-alaa-nabii.pptx
@@ -247,22 +247,22 @@
                   <c:v>10</c:v>
                 </c:pt>
                 <c:pt idx="1">
-                  <c:v>20</c:v>
+                  <c:v>15</c:v>
                 </c:pt>
                 <c:pt idx="2">
-                  <c:v>50</c:v>
+                  <c:v>45</c:v>
                 </c:pt>
                 <c:pt idx="3">
                   <c:v>50</c:v>
                 </c:pt>
                 <c:pt idx="4">
-                  <c:v>120</c:v>
+                  <c:v>115</c:v>
                 </c:pt>
                 <c:pt idx="5">
                   <c:v>120</c:v>
                 </c:pt>
                 <c:pt idx="6">
-                  <c:v>150</c:v>
+                  <c:v>145</c:v>
                 </c:pt>
               </c:numCache>
             </c:numRef>
@@ -343,7 +343,7 @@
         <c:axId val="2094734552"/>
         <c:scaling>
           <c:orientation val="minMax"/>
-          <c:max val="175"/>
+          <c:max val="160"/>
         </c:scaling>
         <c:delete val="0"/>
         <c:axPos val="b"/>
@@ -985,7 +985,7 @@
           <a:p>
             <a:r>
               <a:rPr lang="en-US" dirty="0"/>
-              <a:t>Les 20 000 FCFA d'écart entre 520 000 et 500 000 correspondent à la communication et à la marge, pris en charge par la Dahira.</a:t>
+              <a:t>Les trois premiers postes — montage, déplacements, tournage — représentent 76 % du budget. Ce sont eux qui déterminent le nombre d'intervenants que le film pourra aller rencontrer.</a:t>
             </a:r>
             <a:endParaRPr lang="en-US" dirty="0"/>
           </a:p>
@@ -2694,7 +2694,7 @@
                 <a:ea typeface="Cambria" pitchFamily="34" charset="-122"/>
                 <a:cs typeface="Cambria" pitchFamily="34" charset="-120"/>
               </a:rPr>
-              <a:t>520 000 FCFA</a:t>
+              <a:t>500 000 FCFA</a:t>
             </a:r>
             <a:endParaRPr lang="en-US" sz="1600" dirty="0"/>
           </a:p>
@@ -2733,7 +2733,7 @@
                 <a:ea typeface="Calibri" pitchFamily="34" charset="-122"/>
                 <a:cs typeface="Calibri" pitchFamily="34" charset="-120"/>
               </a:rPr>
-              <a:t>Budget prévisionnel</a:t>
+              <a:t>Budget, intégralement recherché</a:t>
             </a:r>
             <a:endParaRPr lang="en-US" sz="1100" dirty="0"/>
           </a:p>
@@ -2799,7 +2799,7 @@
                 <a:ea typeface="Cambria" pitchFamily="34" charset="-122"/>
                 <a:cs typeface="Cambria" pitchFamily="34" charset="-120"/>
               </a:rPr>
-              <a:t>500 000 FCFA</a:t>
+              <a:t>26–40 MIN</a:t>
             </a:r>
             <a:endParaRPr lang="en-US" sz="1600" dirty="0"/>
           </a:p>
@@ -2838,7 +2838,7 @@
                 <a:ea typeface="Calibri" pitchFamily="34" charset="-122"/>
                 <a:cs typeface="Calibri" pitchFamily="34" charset="-120"/>
               </a:rPr>
-              <a:t>Financement recherché</a:t>
+              <a:t>Documentaire + capsules</a:t>
             </a:r>
             <a:endParaRPr lang="en-US" sz="1100" dirty="0"/>
           </a:p>
@@ -4139,7 +4139,7 @@
                 <a:ea typeface="Cambria" pitchFamily="34" charset="-122"/>
                 <a:cs typeface="Cambria" pitchFamily="34" charset="-120"/>
               </a:rPr>
-              <a:t>520 000 FCFA</a:t>
+              <a:t>500 000 FCFA</a:t>
             </a:r>
             <a:endParaRPr lang="en-US" sz="1900" dirty="0"/>
           </a:p>
@@ -4178,7 +4178,7 @@
                 <a:ea typeface="Calibri" pitchFamily="34" charset="-122"/>
                 <a:cs typeface="Calibri" pitchFamily="34" charset="-120"/>
               </a:rPr>
-              <a:t>Budget total prévisionnel</a:t>
+              <a:t>Budget total, intégralement recherché</a:t>
             </a:r>
             <a:endParaRPr lang="en-US" sz="1100" dirty="0"/>
           </a:p>
@@ -4244,7 +4244,7 @@
                 <a:ea typeface="Cambria" pitchFamily="34" charset="-122"/>
                 <a:cs typeface="Cambria" pitchFamily="34" charset="-120"/>
               </a:rPr>
-              <a:t>500 000 FCFA</a:t>
+              <a:t>145 000 FCFA</a:t>
             </a:r>
             <a:endParaRPr lang="en-US" sz="1900" dirty="0"/>
           </a:p>
@@ -4283,7 +4283,7 @@
                 <a:ea typeface="Calibri" pitchFamily="34" charset="-122"/>
                 <a:cs typeface="Calibri" pitchFamily="34" charset="-120"/>
               </a:rPr>
-              <a:t>Recherchés auprès de partenaires</a:t>
+              <a:t>Poste le plus lourd : le montage</a:t>
             </a:r>
             <a:endParaRPr lang="en-US" sz="1100" dirty="0"/>
           </a:p>
@@ -4349,7 +4349,7 @@
                 <a:ea typeface="Cambria" pitchFamily="34" charset="-122"/>
                 <a:cs typeface="Cambria" pitchFamily="34" charset="-120"/>
               </a:rPr>
-              <a:t>75 %</a:t>
+              <a:t>76 %</a:t>
             </a:r>
             <a:endParaRPr lang="en-US" sz="1900" dirty="0"/>
           </a:p>
@@ -4430,7 +4430,7 @@
                 <a:ea typeface="Calibri" pitchFamily="34" charset="-122"/>
                 <a:cs typeface="Calibri" pitchFamily="34" charset="-120"/>
               </a:rPr>
-              <a:t>Montant prévisionnel, ajustable selon le nombre d'intervenants, les villes de tournage et les besoins techniques définitifs. Toute contribution supplémentaire ira en priorité aux déplacements, qui conditionnent le nombre d'intervenants accessibles.</a:t>
+              <a:t>Chaque poste est chiffré au plus juste : il n'y a pas de dépense de confort dans ce budget. Toute contribution supplémentaire ira en priorité aux déplacements, qui conditionnent le nombre d'intervenants accessibles.</a:t>
             </a:r>
             <a:endParaRPr lang="en-US" sz="1100" dirty="0"/>
           </a:p>
@@ -5392,7 +5392,7 @@
                 <a:ea typeface="Cambria" pitchFamily="34" charset="-122"/>
                 <a:cs typeface="Cambria" pitchFamily="34" charset="-120"/>
               </a:rPr>
-              <a:t>520 000</a:t>
+              <a:t>500 000</a:t>
             </a:r>
             <a:endParaRPr lang="en-US" sz="2400" dirty="0"/>
           </a:p>
@@ -7674,7 +7674,7 @@
                 <a:ea typeface="Cambria" pitchFamily="34" charset="-122"/>
                 <a:cs typeface="Cambria" pitchFamily="34" charset="-120"/>
               </a:rPr>
-              <a:t>520 000</a:t>
+              <a:t>500 000</a:t>
             </a:r>
             <a:endParaRPr lang="en-US" sz="2600" dirty="0"/>
           </a:p>
@@ -7713,7 +7713,7 @@
                 <a:ea typeface="Calibri" pitchFamily="34" charset="-122"/>
                 <a:cs typeface="Calibri" pitchFamily="34" charset="-120"/>
               </a:rPr>
-              <a:t>Budget total, en FCFA</a:t>
+              <a:t>Budget, en FCFA</a:t>
             </a:r>
             <a:endParaRPr lang="en-US" sz="1150" dirty="0"/>
           </a:p>
@@ -7779,7 +7779,7 @@
                 <a:ea typeface="Cambria" pitchFamily="34" charset="-122"/>
                 <a:cs typeface="Cambria" pitchFamily="34" charset="-120"/>
               </a:rPr>
-              <a:t>500 000</a:t>
+              <a:t>26–40 min</a:t>
             </a:r>
             <a:endParaRPr lang="en-US" sz="2600" dirty="0"/>
           </a:p>
@@ -7818,7 +7818,7 @@
                 <a:ea typeface="Calibri" pitchFamily="34" charset="-122"/>
                 <a:cs typeface="Calibri" pitchFamily="34" charset="-120"/>
               </a:rPr>
-              <a:t>Recherchés, en FCFA</a:t>
+              <a:t>Documentaire + capsules</a:t>
             </a:r>
             <a:endParaRPr lang="en-US" sz="1150" dirty="0"/>
           </a:p>
@@ -7884,7 +7884,7 @@
                 <a:ea typeface="Cambria" pitchFamily="34" charset="-122"/>
                 <a:cs typeface="Cambria" pitchFamily="34" charset="-120"/>
               </a:rPr>
-              <a:t>26–40 min</a:t>
+              <a:t>Mars 2027</a:t>
             </a:r>
             <a:endParaRPr lang="en-US" sz="2600" dirty="0"/>
           </a:p>
@@ -7923,7 +7923,7 @@
                 <a:ea typeface="Calibri" pitchFamily="34" charset="-122"/>
                 <a:cs typeface="Calibri" pitchFamily="34" charset="-120"/>
               </a:rPr>
-              <a:t>Documentaire + capsules</a:t>
+              <a:t>Livraison des masters</a:t>
             </a:r>
             <a:endParaRPr lang="en-US" sz="1150" dirty="0"/>
           </a:p>

--- a/public/documents/presentation-salaatu-alaa-nabii.pptx
+++ b/public/documents/presentation-salaatu-alaa-nabii.pptx
@@ -7948,12 +7948,7 @@
           <a:solidFill>
             <a:srgbClr val="082F22"/>
           </a:solidFill>
-          <a:ln w="12700">
-            <a:solidFill>
-              <a:srgbClr val="082F22"/>
-            </a:solidFill>
-            <a:prstDash val="solid"/>
-          </a:ln>
+          <a:ln/>
         </p:spPr>
       </p:sp>
       <p:sp>
@@ -8261,12 +8256,7 @@
           <a:solidFill>
             <a:srgbClr val="B8860B"/>
           </a:solidFill>
-          <a:ln w="12700">
-            <a:solidFill>
-              <a:srgbClr val="B8860B"/>
-            </a:solidFill>
-            <a:prstDash val="solid"/>
-          </a:ln>
+          <a:ln/>
         </p:spPr>
       </p:sp>
       <p:sp>
@@ -8461,12 +8451,7 @@
           <a:solidFill>
             <a:srgbClr val="B8860B"/>
           </a:solidFill>
-          <a:ln w="12700">
-            <a:solidFill>
-              <a:srgbClr val="B8860B"/>
-            </a:solidFill>
-            <a:prstDash val="solid"/>
-          </a:ln>
+          <a:ln/>
         </p:spPr>
       </p:sp>
       <p:sp>
@@ -8661,12 +8646,7 @@
           <a:solidFill>
             <a:srgbClr val="B8860B"/>
           </a:solidFill>
-          <a:ln w="12700">
-            <a:solidFill>
-              <a:srgbClr val="B8860B"/>
-            </a:solidFill>
-            <a:prstDash val="solid"/>
-          </a:ln>
+          <a:ln/>
         </p:spPr>
       </p:sp>
       <p:sp>
@@ -9542,12 +9522,7 @@
           <a:solidFill>
             <a:srgbClr val="D4AF37"/>
           </a:solidFill>
-          <a:ln w="12700">
-            <a:solidFill>
-              <a:srgbClr val="D4AF37"/>
-            </a:solidFill>
-            <a:prstDash val="solid"/>
-          </a:ln>
+          <a:ln/>
         </p:spPr>
       </p:sp>
       <p:sp>
@@ -9648,12 +9623,7 @@
           <a:solidFill>
             <a:srgbClr val="D4AF37"/>
           </a:solidFill>
-          <a:ln w="12700">
-            <a:solidFill>
-              <a:srgbClr val="D4AF37"/>
-            </a:solidFill>
-            <a:prstDash val="solid"/>
-          </a:ln>
+          <a:ln/>
         </p:spPr>
       </p:sp>
       <p:sp>
@@ -9754,12 +9724,7 @@
           <a:solidFill>
             <a:srgbClr val="D4AF37"/>
           </a:solidFill>
-          <a:ln w="12700">
-            <a:solidFill>
-              <a:srgbClr val="D4AF37"/>
-            </a:solidFill>
-            <a:prstDash val="solid"/>
-          </a:ln>
+          <a:ln/>
         </p:spPr>
       </p:sp>
       <p:sp>
@@ -9860,12 +9825,7 @@
           <a:solidFill>
             <a:srgbClr val="D4AF37"/>
           </a:solidFill>
-          <a:ln w="12700">
-            <a:solidFill>
-              <a:srgbClr val="D4AF37"/>
-            </a:solidFill>
-            <a:prstDash val="solid"/>
-          </a:ln>
+          <a:ln/>
         </p:spPr>
       </p:sp>
       <p:sp>
@@ -9966,12 +9926,7 @@
           <a:solidFill>
             <a:srgbClr val="D4AF37"/>
           </a:solidFill>
-          <a:ln w="12700">
-            <a:solidFill>
-              <a:srgbClr val="D4AF37"/>
-            </a:solidFill>
-            <a:prstDash val="solid"/>
-          </a:ln>
+          <a:ln/>
         </p:spPr>
       </p:sp>
       <p:sp>
@@ -10237,12 +10192,7 @@
           <a:solidFill>
             <a:srgbClr val="B8860B"/>
           </a:solidFill>
-          <a:ln w="12700">
-            <a:solidFill>
-              <a:srgbClr val="B8860B"/>
-            </a:solidFill>
-            <a:prstDash val="solid"/>
-          </a:ln>
+          <a:ln/>
         </p:spPr>
       </p:sp>
       <p:sp>
@@ -10437,12 +10387,7 @@
           <a:solidFill>
             <a:srgbClr val="B8860B"/>
           </a:solidFill>
-          <a:ln w="12700">
-            <a:solidFill>
-              <a:srgbClr val="B8860B"/>
-            </a:solidFill>
-            <a:prstDash val="solid"/>
-          </a:ln>
+          <a:ln/>
         </p:spPr>
       </p:sp>
       <p:sp>
@@ -10637,12 +10582,7 @@
           <a:solidFill>
             <a:srgbClr val="B8860B"/>
           </a:solidFill>
-          <a:ln w="12700">
-            <a:solidFill>
-              <a:srgbClr val="B8860B"/>
-            </a:solidFill>
-            <a:prstDash val="solid"/>
-          </a:ln>
+          <a:ln/>
         </p:spPr>
       </p:sp>
       <p:sp>
@@ -10837,12 +10777,7 @@
           <a:solidFill>
             <a:srgbClr val="B8860B"/>
           </a:solidFill>
-          <a:ln w="12700">
-            <a:solidFill>
-              <a:srgbClr val="B8860B"/>
-            </a:solidFill>
-            <a:prstDash val="solid"/>
-          </a:ln>
+          <a:ln/>
         </p:spPr>
       </p:sp>
       <p:sp>
@@ -11815,12 +11750,7 @@
           <a:solidFill>
             <a:srgbClr val="082F22"/>
           </a:solidFill>
-          <a:ln w="12700">
-            <a:solidFill>
-              <a:srgbClr val="082F22"/>
-            </a:solidFill>
-            <a:prstDash val="solid"/>
-          </a:ln>
+          <a:ln/>
         </p:spPr>
       </p:sp>
       <p:sp>
@@ -12155,12 +12085,7 @@
           <a:solidFill>
             <a:srgbClr val="B8860B"/>
           </a:solidFill>
-          <a:ln w="12700">
-            <a:solidFill>
-              <a:srgbClr val="B8860B"/>
-            </a:solidFill>
-            <a:prstDash val="solid"/>
-          </a:ln>
+          <a:ln/>
         </p:spPr>
       </p:sp>
       <p:sp>
@@ -12366,12 +12291,7 @@
           <a:solidFill>
             <a:srgbClr val="B8860B"/>
           </a:solidFill>
-          <a:ln w="12700">
-            <a:solidFill>
-              <a:srgbClr val="B8860B"/>
-            </a:solidFill>
-            <a:prstDash val="solid"/>
-          </a:ln>
+          <a:ln/>
         </p:spPr>
       </p:sp>
       <p:sp>
@@ -12577,12 +12497,7 @@
           <a:solidFill>
             <a:srgbClr val="B8860B"/>
           </a:solidFill>
-          <a:ln w="12700">
-            <a:solidFill>
-              <a:srgbClr val="B8860B"/>
-            </a:solidFill>
-            <a:prstDash val="solid"/>
-          </a:ln>
+          <a:ln/>
         </p:spPr>
       </p:sp>
       <p:sp>
@@ -12788,12 +12703,7 @@
           <a:solidFill>
             <a:srgbClr val="B8860B"/>
           </a:solidFill>
-          <a:ln w="12700">
-            <a:solidFill>
-              <a:srgbClr val="B8860B"/>
-            </a:solidFill>
-            <a:prstDash val="solid"/>
-          </a:ln>
+          <a:ln/>
         </p:spPr>
       </p:sp>
       <p:sp>
@@ -12999,12 +12909,7 @@
           <a:solidFill>
             <a:srgbClr val="B8860B"/>
           </a:solidFill>
-          <a:ln w="12700">
-            <a:solidFill>
-              <a:srgbClr val="B8860B"/>
-            </a:solidFill>
-            <a:prstDash val="solid"/>
-          </a:ln>
+          <a:ln/>
         </p:spPr>
       </p:sp>
       <p:sp>
@@ -13359,12 +13264,7 @@
           <a:solidFill>
             <a:srgbClr val="D4AF37"/>
           </a:solidFill>
-          <a:ln w="12700">
-            <a:solidFill>
-              <a:srgbClr val="D4AF37"/>
-            </a:solidFill>
-            <a:prstDash val="solid"/>
-          </a:ln>
+          <a:ln/>
         </p:spPr>
       </p:sp>
       <p:sp>
@@ -13531,12 +13431,7 @@
           <a:solidFill>
             <a:srgbClr val="B8860B"/>
           </a:solidFill>
-          <a:ln w="12700">
-            <a:solidFill>
-              <a:srgbClr val="B8860B"/>
-            </a:solidFill>
-            <a:prstDash val="solid"/>
-          </a:ln>
+          <a:ln/>
         </p:spPr>
       </p:sp>
       <p:sp>
@@ -13703,12 +13598,7 @@
           <a:solidFill>
             <a:srgbClr val="B8860B"/>
           </a:solidFill>
-          <a:ln w="12700">
-            <a:solidFill>
-              <a:srgbClr val="B8860B"/>
-            </a:solidFill>
-            <a:prstDash val="solid"/>
-          </a:ln>
+          <a:ln/>
         </p:spPr>
       </p:sp>
       <p:sp>
@@ -13875,12 +13765,7 @@
           <a:solidFill>
             <a:srgbClr val="B8860B"/>
           </a:solidFill>
-          <a:ln w="12700">
-            <a:solidFill>
-              <a:srgbClr val="B8860B"/>
-            </a:solidFill>
-            <a:prstDash val="solid"/>
-          </a:ln>
+          <a:ln/>
         </p:spPr>
       </p:sp>
       <p:sp>
